--- a/decks/geog-resources/geog-resources_ch3_energy-security.pptx
+++ b/decks/geog-resources/geog-resources_ch3_energy-security.pptx
@@ -127,30 +127,30 @@
   <p:extLst>
     <p:ext uri="{521415D9-36F7-43E2-AB2F-B90AF26B5E84}">
       <p14:sectionLst xmlns:p14="http://schemas.microsoft.com/office/powerpoint/2010/main">
-        <p14:section name="Opening" id="{c9b26cd5-bb71-d9ff-b255-58e08f66ae34}">
+        <p14:section name="Opening" id="{3fb027cf-38e4-4cc8-7627-a19ee5d541d0}">
           <p14:sldIdLst>
             <p14:sldId id="256"/>
           </p14:sldIdLst>
         </p14:section>
-        <p14:section name="Gate" id="{7cd28d71-21c5-dcfd-651f-2ef97915edf4}">
+        <p14:section name="Gate" id="{7739a264-5bf2-bc5a-f6c4-7ca6adda9eac}">
           <p14:sldIdLst>
             <p14:sldId id="257"/>
             <p14:sldId id="258"/>
           </p14:sldIdLst>
         </p14:section>
-        <p14:section name="Pre-teach" id="{adead428-fc88-406e-5628-f68fcf60e4c8}">
+        <p14:section name="Pre-teach" id="{a953e25b-243d-1934-15f0-183ed320bf66}">
           <p14:sldIdLst>
             <p14:sldId id="259"/>
             <p14:sldId id="260"/>
           </p14:sldIdLst>
         </p14:section>
-        <p14:section name="Read-along" id="{a103bf60-ecc1-6ba1-8ba1-6b0a85af1f72}">
+        <p14:section name="Read-along" id="{efd29ad6-4218-72ee-2da4-c28673dcb233}">
           <p14:sldIdLst>
             <p14:sldId id="261"/>
             <p14:sldId id="262"/>
           </p14:sldIdLst>
         </p14:section>
-        <p14:section name="Teach" id="{a166c7f5-42cd-c453-bb41-46b644d5afac}">
+        <p14:section name="Teach" id="{500b7ca8-7f41-96c3-7d40-3ba235783383}">
           <p14:sldIdLst>
             <p14:sldId id="263"/>
             <p14:sldId id="264"/>
@@ -160,7 +160,7 @@
             <p14:sldId id="268"/>
           </p14:sldIdLst>
         </p14:section>
-        <p14:section name="Routes" id="{d2ff21a9-26bc-e07c-f2b3-e705ac0b56ad}">
+        <p14:section name="Routes" id="{6ab1a2d8-07e7-81b1-dc43-66d44c8f6821}">
           <p14:sldIdLst>
             <p14:sldId id="269"/>
             <p14:sldId id="270"/>
@@ -168,12 +168,12 @@
             <p14:sldId id="272"/>
           </p14:sldIdLst>
         </p14:section>
-        <p14:section name="Close" id="{48155346-e24f-7983-15b4-177dd3ae19ef}">
+        <p14:section name="Close" id="{6751a9e6-85eb-4842-c8e3-e7c913764505}">
           <p14:sldIdLst>
             <p14:sldId id="273"/>
           </p14:sldIdLst>
         </p14:section>
-        <p14:section name="Answers" id="{b610dda6-c3a4-eb02-d632-07b698de9a5d}">
+        <p14:section name="Answers" id="{33ff573c-53fb-598f-f126-bc1751e57913}">
           <p14:sldIdLst>
             <p14:sldId id="274"/>
             <p14:sldId id="275"/>
